--- a/src/test/resources/pptx/template.pptx
+++ b/src/test/resources/pptx/template.pptx
@@ -3690,7 +3690,7 @@
         <p:spPr>
           <a:xfrm>
             <a:off x="-635" y="0"/>
-            <a:ext cx="6082030" cy="3454400"/>
+            <a:ext cx="2585085" cy="1642110"/>
           </a:xfrm>
           <a:prstGeom prst="rect">
             <a:avLst/>
@@ -3726,8 +3726,8 @@
         </p:nvSpPr>
         <p:spPr>
           <a:xfrm>
-            <a:off x="6082665" y="635"/>
-            <a:ext cx="6109970" cy="3453765"/>
+            <a:off x="4639310" y="2030730"/>
+            <a:ext cx="2945765" cy="2866390"/>
           </a:xfrm>
           <a:prstGeom prst="rect">
             <a:avLst/>
@@ -3749,7 +3749,7 @@
           <a:p>
             <a:r>
               <a:rPr lang="en-US" altLang="zh-CN"/>
-              <a:t>${imgChart2}</a:t>
+              <a:t>${imgChart1}</a:t>
             </a:r>
             <a:endParaRPr lang="en-US" altLang="zh-CN"/>
           </a:p>
